--- a/slides/2_tabular.pptx
+++ b/slides/2_tabular.pptx
@@ -492,7 +492,7 @@
           <a:p>
             <a:fld id="{506E0FD1-891F-4B1E-916D-E9B585160BB8}" type="datetimeFigureOut">
               <a:rPr lang="en-GB" smtClean="0"/>
-              <a:t>26/01/2026</a:t>
+              <a:t>02/03/2026</a:t>
             </a:fld>
             <a:endParaRPr lang="en-GB"/>
           </a:p>
@@ -909,7 +909,7 @@
           <a:p>
             <a:fld id="{D68C3F22-27B2-44E3-9C5F-D08126455F6F}" type="datetime1">
               <a:rPr lang="en-GB" smtClean="0"/>
-              <a:t>26/01/2026</a:t>
+              <a:t>02/03/2026</a:t>
             </a:fld>
             <a:endParaRPr lang="en-GB"/>
           </a:p>
@@ -1109,7 +1109,7 @@
           <a:p>
             <a:fld id="{1CD03846-7BF6-4FB6-A921-FF3379ADBD4C}" type="datetime1">
               <a:rPr lang="en-GB" smtClean="0"/>
-              <a:t>26/01/2026</a:t>
+              <a:t>02/03/2026</a:t>
             </a:fld>
             <a:endParaRPr lang="en-GB"/>
           </a:p>
@@ -1319,7 +1319,7 @@
           <a:p>
             <a:fld id="{99E1B91A-3FD0-4144-9C84-63E9688ED2FE}" type="datetime1">
               <a:rPr lang="en-GB" smtClean="0"/>
-              <a:t>26/01/2026</a:t>
+              <a:t>02/03/2026</a:t>
             </a:fld>
             <a:endParaRPr lang="en-GB"/>
           </a:p>
@@ -1519,7 +1519,7 @@
           <a:p>
             <a:fld id="{5295ED7B-FEAD-4734-819F-93EF4B0EA908}" type="datetime1">
               <a:rPr lang="en-GB" smtClean="0"/>
-              <a:t>26/01/2026</a:t>
+              <a:t>02/03/2026</a:t>
             </a:fld>
             <a:endParaRPr lang="en-GB"/>
           </a:p>
@@ -1795,7 +1795,7 @@
           <a:p>
             <a:fld id="{D2D5D4B4-C926-4B45-8815-1ED8911179A2}" type="datetime1">
               <a:rPr lang="en-GB" smtClean="0"/>
-              <a:t>26/01/2026</a:t>
+              <a:t>02/03/2026</a:t>
             </a:fld>
             <a:endParaRPr lang="en-GB"/>
           </a:p>
@@ -2063,7 +2063,7 @@
           <a:p>
             <a:fld id="{B4C5210A-0E37-4935-93AF-69F21A5F712F}" type="datetime1">
               <a:rPr lang="en-GB" smtClean="0"/>
-              <a:t>26/01/2026</a:t>
+              <a:t>02/03/2026</a:t>
             </a:fld>
             <a:endParaRPr lang="en-GB"/>
           </a:p>
@@ -2478,7 +2478,7 @@
           <a:p>
             <a:fld id="{3D3A6B2F-436C-4691-80E8-9C890E000E9D}" type="datetime1">
               <a:rPr lang="en-GB" smtClean="0"/>
-              <a:t>26/01/2026</a:t>
+              <a:t>02/03/2026</a:t>
             </a:fld>
             <a:endParaRPr lang="en-GB"/>
           </a:p>
@@ -2620,7 +2620,7 @@
           <a:p>
             <a:fld id="{84385F4C-D74B-496F-8D21-97E3549C783B}" type="datetime1">
               <a:rPr lang="en-GB" smtClean="0"/>
-              <a:t>26/01/2026</a:t>
+              <a:t>02/03/2026</a:t>
             </a:fld>
             <a:endParaRPr lang="en-GB"/>
           </a:p>
@@ -2733,7 +2733,7 @@
           <a:p>
             <a:fld id="{0CBDCB32-C241-4703-A832-4EB47BD54E83}" type="datetime1">
               <a:rPr lang="en-GB" smtClean="0"/>
-              <a:t>26/01/2026</a:t>
+              <a:t>02/03/2026</a:t>
             </a:fld>
             <a:endParaRPr lang="en-GB"/>
           </a:p>
@@ -3046,7 +3046,7 @@
           <a:p>
             <a:fld id="{85C150FF-BE95-4D25-A16A-E368A81CBF24}" type="datetime1">
               <a:rPr lang="en-GB" smtClean="0"/>
-              <a:t>26/01/2026</a:t>
+              <a:t>02/03/2026</a:t>
             </a:fld>
             <a:endParaRPr lang="en-GB"/>
           </a:p>
@@ -3335,7 +3335,7 @@
           <a:p>
             <a:fld id="{F3C5DB4B-B349-43C9-A424-BADA723AD9F1}" type="datetime1">
               <a:rPr lang="en-GB" smtClean="0"/>
-              <a:t>26/01/2026</a:t>
+              <a:t>02/03/2026</a:t>
             </a:fld>
             <a:endParaRPr lang="en-GB"/>
           </a:p>
@@ -3578,7 +3578,7 @@
           <a:p>
             <a:fld id="{12632426-0A0C-405F-A3D0-2D11AA44702A}" type="datetime1">
               <a:rPr lang="en-GB" smtClean="0"/>
-              <a:t>26/01/2026</a:t>
+              <a:t>02/03/2026</a:t>
             </a:fld>
             <a:endParaRPr lang="en-GB"/>
           </a:p>
@@ -6497,8 +6497,8 @@
           </a:p>
         </p:txBody>
       </p:sp>
-      <mc:AlternateContent xmlns:mc="http://schemas.openxmlformats.org/markup-compatibility/2006" xmlns:a14="http://schemas.microsoft.com/office/drawing/2010/main">
-        <mc:Choice Requires="a14">
+      <mc:AlternateContent xmlns:mc="http://schemas.openxmlformats.org/markup-compatibility/2006">
+        <mc:Choice xmlns:a14="http://schemas.microsoft.com/office/drawing/2010/main" Requires="a14">
           <p:sp>
             <p:nvSpPr>
               <p:cNvPr id="3" name="Content Placeholder 2">
@@ -6517,7 +6517,9 @@
             </p:nvSpPr>
             <p:spPr/>
             <p:txBody>
-              <a:bodyPr/>
+              <a:bodyPr>
+                <a:normAutofit/>
+              </a:bodyPr>
               <a:lstStyle/>
               <a:p>
                 <a:pPr marL="0" indent="0">
@@ -6874,37 +6876,12 @@
                                   </a:rPr>
                                   <m:t>,</m:t>
                                 </m:r>
-                                <m:sSub>
-                                  <m:sSubPr>
-                                    <m:ctrlPr>
-                                      <a:rPr lang="en-US" sz="2400" i="1">
-                                        <a:latin typeface="Cambria Math" panose="02040503050406030204" pitchFamily="18" charset="0"/>
-                                      </a:rPr>
-                                    </m:ctrlPr>
-                                  </m:sSubPr>
-                                  <m:e>
-                                    <m:r>
-                                      <a:rPr lang="en-US" sz="2400" i="1">
-                                        <a:latin typeface="Cambria Math" panose="02040503050406030204" pitchFamily="18" charset="0"/>
-                                      </a:rPr>
-                                      <m:t>𝑎</m:t>
-                                    </m:r>
-                                  </m:e>
-                                  <m:sub>
-                                    <m:r>
-                                      <a:rPr lang="en-US" sz="2400" i="1">
-                                        <a:latin typeface="Cambria Math" panose="02040503050406030204" pitchFamily="18" charset="0"/>
-                                      </a:rPr>
-                                      <m:t>𝑡</m:t>
-                                    </m:r>
-                                    <m:r>
-                                      <a:rPr lang="en-US" sz="2400" i="1">
-                                        <a:latin typeface="Cambria Math" panose="02040503050406030204" pitchFamily="18" charset="0"/>
-                                      </a:rPr>
-                                      <m:t>+1</m:t>
-                                    </m:r>
-                                  </m:sub>
-                                </m:sSub>
+                                <m:r>
+                                  <a:rPr lang="de-DE" sz="2400" b="0" i="1" smtClean="0">
+                                    <a:latin typeface="Cambria Math" panose="02040503050406030204" pitchFamily="18" charset="0"/>
+                                  </a:rPr>
+                                  <m:t>𝑎</m:t>
+                                </m:r>
                               </m:e>
                             </m:d>
                           </m:e>
@@ -6999,14 +6976,117 @@
                   <a:buNone/>
                 </a:pPr>
                 <a:r>
-                  <a:rPr lang="en-GB" sz="2400" dirty="0"/>
-                  <a:t>policy just determines which state-action pairs are visited and updated</a:t>
+                  <a:rPr lang="de-DE" sz="2400" dirty="0" err="1"/>
+                  <a:t>behavior</a:t>
                 </a:r>
+                <a:r>
+                  <a:rPr lang="de-DE" sz="2400" dirty="0"/>
+                  <a:t> </a:t>
+                </a:r>
+                <a:r>
+                  <a:rPr lang="de-DE" sz="2400" dirty="0" err="1"/>
+                  <a:t>policy</a:t>
+                </a:r>
+                <a:r>
+                  <a:rPr lang="de-DE" sz="2400" dirty="0"/>
+                  <a:t> (</a:t>
+                </a:r>
+                <a:r>
+                  <a:rPr lang="de-DE" sz="2400" dirty="0" err="1"/>
+                  <a:t>used</a:t>
+                </a:r>
+                <a:r>
+                  <a:rPr lang="de-DE" sz="2400" dirty="0"/>
+                  <a:t> </a:t>
+                </a:r>
+                <a:r>
+                  <a:rPr lang="de-DE" sz="2400" dirty="0" err="1"/>
+                  <a:t>to</a:t>
+                </a:r>
+                <a:r>
+                  <a:rPr lang="de-DE" sz="2400" dirty="0"/>
+                  <a:t> </a:t>
+                </a:r>
+                <a:r>
+                  <a:rPr lang="de-DE" sz="2400" dirty="0" err="1"/>
+                  <a:t>collect</a:t>
+                </a:r>
+                <a:r>
+                  <a:rPr lang="de-DE" sz="2400" dirty="0"/>
+                  <a:t> </a:t>
+                </a:r>
+                <a:r>
+                  <a:rPr lang="de-DE" sz="2400" dirty="0" err="1"/>
+                  <a:t>data</a:t>
+                </a:r>
+                <a:r>
+                  <a:rPr lang="de-DE" sz="2400" dirty="0"/>
+                  <a:t>) </a:t>
+                </a:r>
+                <a:r>
+                  <a:rPr lang="de-DE" sz="2400" dirty="0" err="1"/>
+                  <a:t>can</a:t>
+                </a:r>
+                <a:r>
+                  <a:rPr lang="de-DE" sz="2400" dirty="0"/>
+                  <a:t> </a:t>
+                </a:r>
+                <a:r>
+                  <a:rPr lang="de-DE" sz="2400" dirty="0" err="1"/>
+                  <a:t>differ</a:t>
+                </a:r>
+                <a:r>
+                  <a:rPr lang="de-DE" sz="2400" dirty="0"/>
+                  <a:t> </a:t>
+                </a:r>
+                <a:r>
+                  <a:rPr lang="de-DE" sz="2400" dirty="0" err="1"/>
+                  <a:t>from</a:t>
+                </a:r>
+                <a:r>
+                  <a:rPr lang="de-DE" sz="2400" dirty="0"/>
+                  <a:t> </a:t>
+                </a:r>
+                <a:r>
+                  <a:rPr lang="de-DE" sz="2400" dirty="0" err="1"/>
+                  <a:t>target</a:t>
+                </a:r>
+                <a:r>
+                  <a:rPr lang="de-DE" sz="2400" dirty="0"/>
+                  <a:t> </a:t>
+                </a:r>
+                <a:r>
+                  <a:rPr lang="de-DE" sz="2400" dirty="0" err="1"/>
+                  <a:t>policy</a:t>
+                </a:r>
+                <a:r>
+                  <a:rPr lang="de-DE" sz="2400" dirty="0"/>
+                  <a:t> (</a:t>
+                </a:r>
+                <a:r>
+                  <a:rPr lang="de-DE" sz="2400" dirty="0" err="1"/>
+                  <a:t>greedy</a:t>
+                </a:r>
+                <a:r>
+                  <a:rPr lang="de-DE" sz="2400" dirty="0"/>
+                  <a:t>)</a:t>
+                </a:r>
+                <a:endParaRPr lang="en-GB" sz="2400" dirty="0"/>
               </a:p>
               <a:p>
                 <a:pPr marL="0" indent="0">
                   <a:buNone/>
                 </a:pPr>
+                <a:r>
+                  <a:rPr lang="en-GB" sz="2400" dirty="0">
+                    <a:sym typeface="Wingdings" pitchFamily="2" charset="2"/>
+                  </a:rPr>
+                  <a:t> </a:t>
+                </a:r>
+                <a:r>
+                  <a:rPr lang="en-DE" sz="2400"/>
+                  <a:t>off-policy</a:t>
+                </a:r>
                 <a:endParaRPr lang="en-GB" sz="2400" dirty="0"/>
               </a:p>
               <a:p>
@@ -7307,41 +7387,13 @@
                                   </m:ctrlPr>
                                 </m:dPr>
                                 <m:e>
-                                  <m:sSub>
-                                    <m:sSubPr>
-                                      <m:ctrlPr>
-                                        <a:rPr lang="en-US" sz="2400" i="1">
-                                          <a:latin typeface="Cambria Math" panose="02040503050406030204" pitchFamily="18" charset="0"/>
-                                          <a:ea typeface="Cambria Math" panose="02040503050406030204" pitchFamily="18" charset="0"/>
-                                        </a:rPr>
-                                      </m:ctrlPr>
-                                    </m:sSubPr>
-                                    <m:e>
-                                      <m:r>
-                                        <a:rPr lang="en-US" sz="2400" i="1">
-                                          <a:latin typeface="Cambria Math" panose="02040503050406030204" pitchFamily="18" charset="0"/>
-                                          <a:ea typeface="Cambria Math" panose="02040503050406030204" pitchFamily="18" charset="0"/>
-                                        </a:rPr>
-                                        <m:t>𝑎</m:t>
-                                      </m:r>
-                                    </m:e>
-                                    <m:sub>
-                                      <m:r>
-                                        <a:rPr lang="en-US" sz="2400" i="1">
-                                          <a:latin typeface="Cambria Math" panose="02040503050406030204" pitchFamily="18" charset="0"/>
-                                          <a:ea typeface="Cambria Math" panose="02040503050406030204" pitchFamily="18" charset="0"/>
-                                        </a:rPr>
-                                        <m:t>𝑡</m:t>
-                                      </m:r>
-                                      <m:r>
-                                        <a:rPr lang="en-US" sz="2400" i="1">
-                                          <a:latin typeface="Cambria Math" panose="02040503050406030204" pitchFamily="18" charset="0"/>
-                                          <a:ea typeface="Cambria Math" panose="02040503050406030204" pitchFamily="18" charset="0"/>
-                                        </a:rPr>
-                                        <m:t>+1</m:t>
-                                      </m:r>
-                                    </m:sub>
-                                  </m:sSub>
+                                  <m:r>
+                                    <a:rPr lang="de-DE" sz="2400" b="0" i="1" smtClean="0">
+                                      <a:latin typeface="Cambria Math" panose="02040503050406030204" pitchFamily="18" charset="0"/>
+                                      <a:ea typeface="Cambria Math" panose="02040503050406030204" pitchFamily="18" charset="0"/>
+                                    </a:rPr>
+                                    <m:t>𝑎</m:t>
+                                  </m:r>
                                   <m:r>
                                     <a:rPr lang="en-US" sz="2400" i="1">
                                       <a:latin typeface="Cambria Math" panose="02040503050406030204" pitchFamily="18" charset="0"/>
@@ -7438,37 +7490,12 @@
                                     </a:rPr>
                                     <m:t>,</m:t>
                                   </m:r>
-                                  <m:sSub>
-                                    <m:sSubPr>
-                                      <m:ctrlPr>
-                                        <a:rPr lang="en-US" sz="2400" i="1">
-                                          <a:latin typeface="Cambria Math" panose="02040503050406030204" pitchFamily="18" charset="0"/>
-                                        </a:rPr>
-                                      </m:ctrlPr>
-                                    </m:sSubPr>
-                                    <m:e>
-                                      <m:r>
-                                        <a:rPr lang="en-US" sz="2400" i="1">
-                                          <a:latin typeface="Cambria Math" panose="02040503050406030204" pitchFamily="18" charset="0"/>
-                                        </a:rPr>
-                                        <m:t>𝑎</m:t>
-                                      </m:r>
-                                    </m:e>
-                                    <m:sub>
-                                      <m:r>
-                                        <a:rPr lang="en-US" sz="2400" i="1">
-                                          <a:latin typeface="Cambria Math" panose="02040503050406030204" pitchFamily="18" charset="0"/>
-                                        </a:rPr>
-                                        <m:t>𝑡</m:t>
-                                      </m:r>
-                                      <m:r>
-                                        <a:rPr lang="en-US" sz="2400" i="1">
-                                          <a:latin typeface="Cambria Math" panose="02040503050406030204" pitchFamily="18" charset="0"/>
-                                        </a:rPr>
-                                        <m:t>+1</m:t>
-                                      </m:r>
-                                    </m:sub>
-                                  </m:sSub>
+                                  <m:r>
+                                    <a:rPr lang="de-DE" sz="2400" b="0" i="1" smtClean="0">
+                                      <a:latin typeface="Cambria Math" panose="02040503050406030204" pitchFamily="18" charset="0"/>
+                                    </a:rPr>
+                                    <m:t>𝑎</m:t>
+                                  </m:r>
                                 </m:e>
                               </m:d>
                             </m:e>
@@ -7562,7 +7589,7 @@
             </p:txBody>
           </p:sp>
         </mc:Choice>
-        <mc:Fallback xmlns="">
+        <mc:Fallback>
           <p:sp>
             <p:nvSpPr>
               <p:cNvPr id="3" name="Content Placeholder 2">
@@ -7583,7 +7610,7 @@
               <a:blipFill>
                 <a:blip r:embed="rId3"/>
                 <a:stretch>
-                  <a:fillRect l="-965" t="-1744" r="-724" b="-37209"/>
+                  <a:fillRect l="-965" t="-2035" b="-37209"/>
                 </a:stretch>
               </a:blipFill>
             </p:spPr>
@@ -7592,7 +7619,7 @@
               <a:lstStyle/>
               <a:p>
                 <a:r>
-                  <a:rPr lang="en-DE">
+                  <a:rPr lang="de-DE">
                     <a:noFill/>
                   </a:rPr>
                   <a:t> </a:t>
@@ -9050,8 +9077,8 @@
           </a:p>
         </p:txBody>
       </p:sp>
-      <mc:AlternateContent xmlns:mc="http://schemas.openxmlformats.org/markup-compatibility/2006">
-        <mc:Choice xmlns:a14="http://schemas.microsoft.com/office/drawing/2010/main" Requires="a14">
+      <mc:AlternateContent xmlns:mc="http://schemas.openxmlformats.org/markup-compatibility/2006" xmlns:a14="http://schemas.microsoft.com/office/drawing/2010/main">
+        <mc:Choice Requires="a14">
           <p:sp>
             <p:nvSpPr>
               <p:cNvPr id="17" name="TextBox 16">
@@ -9192,7 +9219,7 @@
             </p:txBody>
           </p:sp>
         </mc:Choice>
-        <mc:Fallback>
+        <mc:Fallback xmlns="">
           <p:sp>
             <p:nvSpPr>
               <p:cNvPr id="17" name="TextBox 16">
